--- a/topic04-functions-and-lambda-calculus/unit-04a-lectures/wip/talk-3/c-first-class.pptx
+++ b/topic04-functions-and-lambda-calculus/unit-04a-lectures/wip/talk-3/c-first-class.pptx
@@ -546,14 +546,14 @@
           </a:ln>
           <a:extLst>
             <a:ext uri="{909E8E84-426E-40dd-AFC4-6F175D3DCCD1}">
-              <a14:hiddenFill xmlns:a14="http://schemas.microsoft.com/office/drawing/2010/main" xmlns="">
+              <a14:hiddenFill xmlns="" xmlns:a14="http://schemas.microsoft.com/office/drawing/2010/main">
                 <a:solidFill>
                   <a:srgbClr val="FFFFFF"/>
                 </a:solidFill>
               </a14:hiddenFill>
             </a:ext>
             <a:ext uri="{FAA26D3D-D897-4be2-8F04-BA451C77F1D7}">
-              <ma14:placeholderFlag xmlns:ma14="http://schemas.microsoft.com/office/mac/drawingml/2011/main" xmlns="" val="1"/>
+              <ma14:placeholderFlag xmlns="" xmlns:ma14="http://schemas.microsoft.com/office/mac/drawingml/2011/main" val="1"/>
             </a:ext>
           </a:extLst>
         </p:spPr>
@@ -1130,7 +1130,7 @@
           <a:p>
             <a:fld id="{48A87A34-81AB-432B-8DAE-1953F412C126}" type="datetimeFigureOut">
               <a:rPr lang="en-US" smtClean="0"/>
-              <a:t>1/27/26</a:t>
+              <a:t>1/29/26</a:t>
             </a:fld>
             <a:endParaRPr lang="en-US" dirty="0"/>
           </a:p>
@@ -1552,7 +1552,7 @@
             <a:fld id="{48A87A34-81AB-432B-8DAE-1953F412C126}" type="datetimeFigureOut">
               <a:rPr lang="en-US" smtClean="0"/>
               <a:pPr/>
-              <a:t>1/27/26</a:t>
+              <a:t>1/29/26</a:t>
             </a:fld>
             <a:endParaRPr lang="en-US" dirty="0"/>
           </a:p>
@@ -1896,7 +1896,7 @@
             <a:fld id="{48A87A34-81AB-432B-8DAE-1953F412C126}" type="datetimeFigureOut">
               <a:rPr lang="en-US" smtClean="0"/>
               <a:pPr/>
-              <a:t>1/27/26</a:t>
+              <a:t>1/29/26</a:t>
             </a:fld>
             <a:endParaRPr lang="en-US" dirty="0"/>
           </a:p>
@@ -2309,7 +2309,7 @@
             <a:fld id="{48A87A34-81AB-432B-8DAE-1953F412C126}" type="datetimeFigureOut">
               <a:rPr lang="en-US" smtClean="0"/>
               <a:pPr/>
-              <a:t>1/27/26</a:t>
+              <a:t>1/29/26</a:t>
             </a:fld>
             <a:endParaRPr lang="en-US" dirty="0"/>
           </a:p>
@@ -2885,7 +2885,7 @@
             <a:fld id="{48A87A34-81AB-432B-8DAE-1953F412C126}" type="datetimeFigureOut">
               <a:rPr lang="en-US" smtClean="0"/>
               <a:pPr/>
-              <a:t>1/27/26</a:t>
+              <a:t>1/29/26</a:t>
             </a:fld>
             <a:endParaRPr lang="en-US" dirty="0"/>
           </a:p>
@@ -3574,7 +3574,7 @@
             <a:fld id="{48A87A34-81AB-432B-8DAE-1953F412C126}" type="datetimeFigureOut">
               <a:rPr lang="en-US" smtClean="0"/>
               <a:pPr/>
-              <a:t>1/27/26</a:t>
+              <a:t>1/29/26</a:t>
             </a:fld>
             <a:endParaRPr lang="en-US" dirty="0"/>
           </a:p>
@@ -4495,7 +4495,7 @@
             <a:fld id="{48A87A34-81AB-432B-8DAE-1953F412C126}" type="datetimeFigureOut">
               <a:rPr lang="en-US" smtClean="0"/>
               <a:pPr/>
-              <a:t>1/27/26</a:t>
+              <a:t>1/29/26</a:t>
             </a:fld>
             <a:endParaRPr lang="en-US" dirty="0"/>
           </a:p>
@@ -4815,7 +4815,7 @@
           <a:p>
             <a:fld id="{48A87A34-81AB-432B-8DAE-1953F412C126}" type="datetimeFigureOut">
               <a:rPr lang="en-US" smtClean="0"/>
-              <a:t>1/27/26</a:t>
+              <a:t>1/29/26</a:t>
             </a:fld>
             <a:endParaRPr lang="en-US" dirty="0"/>
           </a:p>
@@ -5085,7 +5085,7 @@
           <a:p>
             <a:fld id="{48A87A34-81AB-432B-8DAE-1953F412C126}" type="datetimeFigureOut">
               <a:rPr lang="en-US" smtClean="0"/>
-              <a:t>1/27/26</a:t>
+              <a:t>1/29/26</a:t>
             </a:fld>
             <a:endParaRPr lang="en-US" dirty="0"/>
           </a:p>
@@ -5414,7 +5414,7 @@
           <a:p>
             <a:fld id="{48A87A34-81AB-432B-8DAE-1953F412C126}" type="datetimeFigureOut">
               <a:rPr lang="en-US" smtClean="0"/>
-              <a:t>1/27/26</a:t>
+              <a:t>1/29/26</a:t>
             </a:fld>
             <a:endParaRPr lang="en-US" dirty="0"/>
           </a:p>
@@ -5809,7 +5809,7 @@
           <a:p>
             <a:fld id="{48A87A34-81AB-432B-8DAE-1953F412C126}" type="datetimeFigureOut">
               <a:rPr lang="en-US" smtClean="0"/>
-              <a:t>1/27/26</a:t>
+              <a:t>1/29/26</a:t>
             </a:fld>
             <a:endParaRPr lang="en-US" dirty="0"/>
           </a:p>
@@ -6205,7 +6205,7 @@
           <a:p>
             <a:fld id="{48A87A34-81AB-432B-8DAE-1953F412C126}" type="datetimeFigureOut">
               <a:rPr lang="en-US" smtClean="0"/>
-              <a:t>1/27/26</a:t>
+              <a:t>1/29/26</a:t>
             </a:fld>
             <a:endParaRPr lang="en-US" dirty="0"/>
           </a:p>
@@ -6718,7 +6718,7 @@
             <a:fld id="{48A87A34-81AB-432B-8DAE-1953F412C126}" type="datetimeFigureOut">
               <a:rPr lang="en-US" smtClean="0"/>
               <a:pPr/>
-              <a:t>1/27/26</a:t>
+              <a:t>1/29/26</a:t>
             </a:fld>
             <a:endParaRPr lang="en-US" dirty="0"/>
           </a:p>
@@ -6982,7 +6982,7 @@
           <a:p>
             <a:fld id="{48A87A34-81AB-432B-8DAE-1953F412C126}" type="datetimeFigureOut">
               <a:rPr lang="en-US" smtClean="0"/>
-              <a:t>1/27/26</a:t>
+              <a:t>1/29/26</a:t>
             </a:fld>
             <a:endParaRPr lang="en-US" dirty="0"/>
           </a:p>
@@ -7158,7 +7158,7 @@
           <a:p>
             <a:fld id="{48A87A34-81AB-432B-8DAE-1953F412C126}" type="datetimeFigureOut">
               <a:rPr lang="en-US" smtClean="0"/>
-              <a:t>1/27/26</a:t>
+              <a:t>1/29/26</a:t>
             </a:fld>
             <a:endParaRPr lang="en-US" dirty="0"/>
           </a:p>
@@ -7554,7 +7554,7 @@
           <a:p>
             <a:fld id="{48A87A34-81AB-432B-8DAE-1953F412C126}" type="datetimeFigureOut">
               <a:rPr lang="en-US" smtClean="0"/>
-              <a:t>1/27/26</a:t>
+              <a:t>1/29/26</a:t>
             </a:fld>
             <a:endParaRPr lang="en-US" dirty="0"/>
           </a:p>
@@ -7970,7 +7970,7 @@
             <a:fld id="{48A87A34-81AB-432B-8DAE-1953F412C126}" type="datetimeFigureOut">
               <a:rPr lang="en-US" smtClean="0"/>
               <a:pPr/>
-              <a:t>1/27/26</a:t>
+              <a:t>1/29/26</a:t>
             </a:fld>
             <a:endParaRPr lang="en-US" dirty="0"/>
           </a:p>
@@ -8221,7 +8221,7 @@
             <a:fld id="{48A87A34-81AB-432B-8DAE-1953F412C126}" type="datetimeFigureOut">
               <a:rPr lang="en-US" smtClean="0"/>
               <a:pPr/>
-              <a:t>1/27/26</a:t>
+              <a:t>1/29/26</a:t>
             </a:fld>
             <a:endParaRPr lang="en-US" dirty="0"/>
           </a:p>
@@ -8658,14 +8658,14 @@
           <a:noFill/>
           <a:extLst>
             <a:ext uri="{909E8E84-426E-40dd-AFC4-6F175D3DCCD1}">
-              <a14:hiddenFill xmlns:a14="http://schemas.microsoft.com/office/drawing/2010/main" xmlns="">
+              <a14:hiddenFill xmlns="" xmlns:a14="http://schemas.microsoft.com/office/drawing/2010/main">
                 <a:solidFill>
                   <a:srgbClr val="FFFFFF"/>
                 </a:solidFill>
               </a14:hiddenFill>
             </a:ext>
             <a:ext uri="{91240B29-F687-4f45-9708-019B960494DF}">
-              <a14:hiddenLine xmlns:a14="http://schemas.microsoft.com/office/drawing/2010/main" xmlns="" w="9525">
+              <a14:hiddenLine xmlns="" xmlns:a14="http://schemas.microsoft.com/office/drawing/2010/main" w="9525">
                 <a:solidFill>
                   <a:srgbClr val="000000"/>
                 </a:solidFill>
@@ -8913,14 +8913,14 @@
           </a:ln>
           <a:extLst>
             <a:ext uri="{909E8E84-426E-40dd-AFC4-6F175D3DCCD1}">
-              <a14:hiddenFill xmlns:a14="http://schemas.microsoft.com/office/drawing/2010/main" xmlns="">
+              <a14:hiddenFill xmlns="" xmlns:a14="http://schemas.microsoft.com/office/drawing/2010/main">
                 <a:solidFill>
                   <a:srgbClr val="FFFFFF"/>
                 </a:solidFill>
               </a14:hiddenFill>
             </a:ext>
             <a:ext uri="{91240B29-F687-4f45-9708-019B960494DF}">
-              <a14:hiddenLine xmlns:a14="http://schemas.microsoft.com/office/drawing/2010/main" xmlns="" w="9525">
+              <a14:hiddenLine xmlns="" xmlns:a14="http://schemas.microsoft.com/office/drawing/2010/main" w="9525">
                 <a:solidFill>
                   <a:srgbClr val="000000"/>
                 </a:solidFill>
@@ -9262,14 +9262,14 @@
           <a:effectLst/>
           <a:extLst>
             <a:ext uri="{909E8E84-426E-40dd-AFC4-6F175D3DCCD1}">
-              <a14:hiddenFill xmlns="" xmlns:a14="http://schemas.microsoft.com/office/drawing/2010/main">
+              <a14:hiddenFill xmlns:a14="http://schemas.microsoft.com/office/drawing/2010/main" xmlns="">
                 <a:solidFill>
                   <a:schemeClr val="accent1"/>
                 </a:solidFill>
               </a14:hiddenFill>
             </a:ext>
             <a:ext uri="{AF507438-7753-43e0-B8FC-AC1667EBCBE1}">
-              <a14:hiddenEffects xmlns="" xmlns:a14="http://schemas.microsoft.com/office/drawing/2010/main">
+              <a14:hiddenEffects xmlns:a14="http://schemas.microsoft.com/office/drawing/2010/main" xmlns="">
                 <a:effectLst>
                   <a:outerShdw blurRad="63500" dist="35921" dir="2700000" algn="ctr" rotWithShape="0">
                     <a:schemeClr val="bg2"/>
@@ -9318,14 +9318,14 @@
           <a:effectLst/>
           <a:extLst>
             <a:ext uri="{909E8E84-426E-40dd-AFC4-6F175D3DCCD1}">
-              <a14:hiddenFill xmlns="" xmlns:a14="http://schemas.microsoft.com/office/drawing/2010/main">
+              <a14:hiddenFill xmlns:a14="http://schemas.microsoft.com/office/drawing/2010/main" xmlns="">
                 <a:solidFill>
                   <a:schemeClr val="accent1"/>
                 </a:solidFill>
               </a14:hiddenFill>
             </a:ext>
             <a:ext uri="{AF507438-7753-43e0-B8FC-AC1667EBCBE1}">
-              <a14:hiddenEffects xmlns="" xmlns:a14="http://schemas.microsoft.com/office/drawing/2010/main">
+              <a14:hiddenEffects xmlns:a14="http://schemas.microsoft.com/office/drawing/2010/main" xmlns="">
                 <a:effectLst>
                   <a:outerShdw blurRad="63500" dist="35921" dir="2700000" algn="ctr" rotWithShape="0">
                     <a:schemeClr val="bg2"/>
@@ -9376,14 +9376,14 @@
           <a:noFill/>
           <a:extLst>
             <a:ext uri="{909E8E84-426E-40dd-AFC4-6F175D3DCCD1}">
-              <a14:hiddenFill xmlns:a14="http://schemas.microsoft.com/office/drawing/2010/main" xmlns="">
+              <a14:hiddenFill xmlns="" xmlns:a14="http://schemas.microsoft.com/office/drawing/2010/main">
                 <a:solidFill>
                   <a:srgbClr val="FFFFFF"/>
                 </a:solidFill>
               </a14:hiddenFill>
             </a:ext>
             <a:ext uri="{91240B29-F687-4f45-9708-019B960494DF}">
-              <a14:hiddenLine xmlns:a14="http://schemas.microsoft.com/office/drawing/2010/main" xmlns="" w="9525">
+              <a14:hiddenLine xmlns="" xmlns:a14="http://schemas.microsoft.com/office/drawing/2010/main" w="9525">
                 <a:solidFill>
                   <a:srgbClr val="000000"/>
                 </a:solidFill>
@@ -10250,14 +10250,14 @@
           <a:noFill/>
           <a:extLst>
             <a:ext uri="{909E8E84-426E-40dd-AFC4-6F175D3DCCD1}">
-              <a14:hiddenFill xmlns:a14="http://schemas.microsoft.com/office/drawing/2010/main" xmlns="">
+              <a14:hiddenFill xmlns="" xmlns:a14="http://schemas.microsoft.com/office/drawing/2010/main">
                 <a:solidFill>
                   <a:srgbClr val="FFFFFF"/>
                 </a:solidFill>
               </a14:hiddenFill>
             </a:ext>
             <a:ext uri="{91240B29-F687-4f45-9708-019B960494DF}">
-              <a14:hiddenLine xmlns:a14="http://schemas.microsoft.com/office/drawing/2010/main" xmlns="" w="9525">
+              <a14:hiddenLine xmlns="" xmlns:a14="http://schemas.microsoft.com/office/drawing/2010/main" w="9525">
                 <a:solidFill>
                   <a:srgbClr val="000000"/>
                 </a:solidFill>
@@ -10680,14 +10680,14 @@
           <a:noFill/>
           <a:extLst>
             <a:ext uri="{909E8E84-426E-40dd-AFC4-6F175D3DCCD1}">
-              <a14:hiddenFill xmlns:a14="http://schemas.microsoft.com/office/drawing/2010/main" xmlns="">
+              <a14:hiddenFill xmlns="" xmlns:a14="http://schemas.microsoft.com/office/drawing/2010/main">
                 <a:solidFill>
                   <a:srgbClr val="FFFFFF"/>
                 </a:solidFill>
               </a14:hiddenFill>
             </a:ext>
             <a:ext uri="{91240B29-F687-4f45-9708-019B960494DF}">
-              <a14:hiddenLine xmlns:a14="http://schemas.microsoft.com/office/drawing/2010/main" xmlns="" w="9525">
+              <a14:hiddenLine xmlns="" xmlns:a14="http://schemas.microsoft.com/office/drawing/2010/main" w="9525">
                 <a:solidFill>
                   <a:srgbClr val="000000"/>
                 </a:solidFill>
@@ -11055,14 +11055,14 @@
           <a:noFill/>
           <a:extLst>
             <a:ext uri="{909E8E84-426E-40dd-AFC4-6F175D3DCCD1}">
-              <a14:hiddenFill xmlns:a14="http://schemas.microsoft.com/office/drawing/2010/main" xmlns="">
+              <a14:hiddenFill xmlns="" xmlns:a14="http://schemas.microsoft.com/office/drawing/2010/main">
                 <a:solidFill>
                   <a:srgbClr val="FFFFFF"/>
                 </a:solidFill>
               </a14:hiddenFill>
             </a:ext>
             <a:ext uri="{91240B29-F687-4f45-9708-019B960494DF}">
-              <a14:hiddenLine xmlns:a14="http://schemas.microsoft.com/office/drawing/2010/main" xmlns="" w="9525">
+              <a14:hiddenLine xmlns="" xmlns:a14="http://schemas.microsoft.com/office/drawing/2010/main" w="9525">
                 <a:solidFill>
                   <a:srgbClr val="000000"/>
                 </a:solidFill>
@@ -11467,14 +11467,14 @@
           </a:xfrm>
           <a:extLst>
             <a:ext uri="{909E8E84-426E-40dd-AFC4-6F175D3DCCD1}">
-              <a14:hiddenFill xmlns="" xmlns:a14="http://schemas.microsoft.com/office/drawing/2010/main">
+              <a14:hiddenFill xmlns:a14="http://schemas.microsoft.com/office/drawing/2010/main" xmlns="">
                 <a:solidFill>
                   <a:srgbClr val="FFFFFF"/>
                 </a:solidFill>
               </a14:hiddenFill>
             </a:ext>
             <a:ext uri="{91240B29-F687-4f45-9708-019B960494DF}">
-              <a14:hiddenLine xmlns="" xmlns:a14="http://schemas.microsoft.com/office/drawing/2010/main" w="9525">
+              <a14:hiddenLine xmlns:a14="http://schemas.microsoft.com/office/drawing/2010/main" xmlns="" w="9525">
                 <a:solidFill>
                   <a:srgbClr val="000000"/>
                 </a:solidFill>
@@ -11649,14 +11649,14 @@
           </a:ln>
           <a:extLst>
             <a:ext uri="{909E8E84-426E-40dd-AFC4-6F175D3DCCD1}">
-              <a14:hiddenFill xmlns:a14="http://schemas.microsoft.com/office/drawing/2010/main" xmlns="">
+              <a14:hiddenFill xmlns="" xmlns:a14="http://schemas.microsoft.com/office/drawing/2010/main">
                 <a:solidFill>
                   <a:srgbClr val="FFFFFF"/>
                 </a:solidFill>
               </a14:hiddenFill>
             </a:ext>
             <a:ext uri="{91240B29-F687-4f45-9708-019B960494DF}">
-              <a14:hiddenLine xmlns:a14="http://schemas.microsoft.com/office/drawing/2010/main" xmlns="" w="9525">
+              <a14:hiddenLine xmlns="" xmlns:a14="http://schemas.microsoft.com/office/drawing/2010/main" w="9525">
                 <a:solidFill>
                   <a:srgbClr val="000000"/>
                 </a:solidFill>
@@ -11666,7 +11666,7 @@
               </a14:hiddenLine>
             </a:ext>
             <a:ext uri="{FAA26D3D-D897-4be2-8F04-BA451C77F1D7}">
-              <ma14:placeholderFlag xmlns:ma14="http://schemas.microsoft.com/office/mac/drawingml/2011/main" xmlns="" val="1"/>
+              <ma14:placeholderFlag xmlns="" xmlns:ma14="http://schemas.microsoft.com/office/mac/drawingml/2011/main" val="1"/>
             </a:ext>
           </a:extLst>
         </p:spPr>
@@ -12030,14 +12030,14 @@
           <a:effectLst/>
           <a:extLst>
             <a:ext uri="{909E8E84-426E-40dd-AFC4-6F175D3DCCD1}">
-              <a14:hiddenFill xmlns="" xmlns:a14="http://schemas.microsoft.com/office/drawing/2010/main">
+              <a14:hiddenFill xmlns:a14="http://schemas.microsoft.com/office/drawing/2010/main" xmlns="">
                 <a:solidFill>
                   <a:schemeClr val="accent1"/>
                 </a:solidFill>
               </a14:hiddenFill>
             </a:ext>
             <a:ext uri="{AF507438-7753-43e0-B8FC-AC1667EBCBE1}">
-              <a14:hiddenEffects xmlns="" xmlns:a14="http://schemas.microsoft.com/office/drawing/2010/main">
+              <a14:hiddenEffects xmlns:a14="http://schemas.microsoft.com/office/drawing/2010/main" xmlns="">
                 <a:effectLst>
                   <a:outerShdw blurRad="63500" dist="35921" dir="2700000" algn="ctr" rotWithShape="0">
                     <a:schemeClr val="bg2"/>
@@ -12100,14 +12100,14 @@
           <a:noFill/>
           <a:extLst>
             <a:ext uri="{909E8E84-426E-40dd-AFC4-6F175D3DCCD1}">
-              <a14:hiddenFill xmlns:a14="http://schemas.microsoft.com/office/drawing/2010/main" xmlns="">
+              <a14:hiddenFill xmlns="" xmlns:a14="http://schemas.microsoft.com/office/drawing/2010/main">
                 <a:solidFill>
                   <a:srgbClr val="FFFFFF"/>
                 </a:solidFill>
               </a14:hiddenFill>
             </a:ext>
             <a:ext uri="{91240B29-F687-4f45-9708-019B960494DF}">
-              <a14:hiddenLine xmlns:a14="http://schemas.microsoft.com/office/drawing/2010/main" xmlns="" w="9525">
+              <a14:hiddenLine xmlns="" xmlns:a14="http://schemas.microsoft.com/office/drawing/2010/main" w="9525">
                 <a:solidFill>
                   <a:srgbClr val="000000"/>
                 </a:solidFill>
@@ -12736,14 +12736,14 @@
           </a:ln>
           <a:extLst>
             <a:ext uri="{909E8E84-426E-40dd-AFC4-6F175D3DCCD1}">
-              <a14:hiddenFill xmlns="" xmlns:a14="http://schemas.microsoft.com/office/drawing/2010/main">
+              <a14:hiddenFill xmlns:a14="http://schemas.microsoft.com/office/drawing/2010/main" xmlns="">
                 <a:solidFill>
                   <a:srgbClr val="FFFFFF"/>
                 </a:solidFill>
               </a14:hiddenFill>
             </a:ext>
             <a:ext uri="{91240B29-F687-4f45-9708-019B960494DF}">
-              <a14:hiddenLine xmlns="" xmlns:a14="http://schemas.microsoft.com/office/drawing/2010/main" w="9525">
+              <a14:hiddenLine xmlns:a14="http://schemas.microsoft.com/office/drawing/2010/main" xmlns="" w="9525">
                 <a:solidFill>
                   <a:srgbClr val="000000"/>
                 </a:solidFill>
@@ -12753,7 +12753,7 @@
               </a14:hiddenLine>
             </a:ext>
             <a:ext uri="{FAA26D3D-D897-4be2-8F04-BA451C77F1D7}">
-              <ma14:placeholderFlag xmlns="" xmlns:ma14="http://schemas.microsoft.com/office/mac/drawingml/2011/main" val="1"/>
+              <ma14:placeholderFlag xmlns:ma14="http://schemas.microsoft.com/office/mac/drawingml/2011/main" xmlns="" val="1"/>
             </a:ext>
           </a:extLst>
         </p:spPr>
@@ -13150,14 +13150,14 @@
           <a:noFill/>
           <a:extLst>
             <a:ext uri="{909E8E84-426E-40dd-AFC4-6F175D3DCCD1}">
-              <a14:hiddenFill xmlns:a14="http://schemas.microsoft.com/office/drawing/2010/main" xmlns="">
+              <a14:hiddenFill xmlns="" xmlns:a14="http://schemas.microsoft.com/office/drawing/2010/main">
                 <a:solidFill>
                   <a:srgbClr val="FFFFFF"/>
                 </a:solidFill>
               </a14:hiddenFill>
             </a:ext>
             <a:ext uri="{91240B29-F687-4f45-9708-019B960494DF}">
-              <a14:hiddenLine xmlns:a14="http://schemas.microsoft.com/office/drawing/2010/main" xmlns="" w="9525">
+              <a14:hiddenLine xmlns="" xmlns:a14="http://schemas.microsoft.com/office/drawing/2010/main" w="9525">
                 <a:solidFill>
                   <a:srgbClr val="000000"/>
                 </a:solidFill>
@@ -13880,14 +13880,14 @@
           <a:noFill/>
           <a:extLst>
             <a:ext uri="{909E8E84-426E-40dd-AFC4-6F175D3DCCD1}">
-              <a14:hiddenFill xmlns:a14="http://schemas.microsoft.com/office/drawing/2010/main" xmlns="">
+              <a14:hiddenFill xmlns="" xmlns:a14="http://schemas.microsoft.com/office/drawing/2010/main">
                 <a:solidFill>
                   <a:srgbClr val="FFFFFF"/>
                 </a:solidFill>
               </a14:hiddenFill>
             </a:ext>
             <a:ext uri="{91240B29-F687-4f45-9708-019B960494DF}">
-              <a14:hiddenLine xmlns:a14="http://schemas.microsoft.com/office/drawing/2010/main" xmlns="" w="9525">
+              <a14:hiddenLine xmlns="" xmlns:a14="http://schemas.microsoft.com/office/drawing/2010/main" w="9525">
                 <a:solidFill>
                   <a:srgbClr val="000000"/>
                 </a:solidFill>
@@ -15005,14 +15005,14 @@
           <a:noFill/>
           <a:extLst>
             <a:ext uri="{909E8E84-426E-40dd-AFC4-6F175D3DCCD1}">
-              <a14:hiddenFill xmlns:a14="http://schemas.microsoft.com/office/drawing/2010/main" xmlns="">
+              <a14:hiddenFill xmlns="" xmlns:a14="http://schemas.microsoft.com/office/drawing/2010/main">
                 <a:solidFill>
                   <a:srgbClr val="FFFFFF"/>
                 </a:solidFill>
               </a14:hiddenFill>
             </a:ext>
             <a:ext uri="{91240B29-F687-4f45-9708-019B960494DF}">
-              <a14:hiddenLine xmlns:a14="http://schemas.microsoft.com/office/drawing/2010/main" xmlns="" w="9525">
+              <a14:hiddenLine xmlns="" xmlns:a14="http://schemas.microsoft.com/office/drawing/2010/main" w="9525">
                 <a:solidFill>
                   <a:srgbClr val="000000"/>
                 </a:solidFill>
@@ -15995,14 +15995,14 @@
           <a:noFill/>
           <a:extLst>
             <a:ext uri="{909E8E84-426E-40dd-AFC4-6F175D3DCCD1}">
-              <a14:hiddenFill xmlns="" xmlns:a14="http://schemas.microsoft.com/office/drawing/2010/main">
+              <a14:hiddenFill xmlns:a14="http://schemas.microsoft.com/office/drawing/2010/main" xmlns="">
                 <a:solidFill>
                   <a:srgbClr val="FFFFFF"/>
                 </a:solidFill>
               </a14:hiddenFill>
             </a:ext>
             <a:ext uri="{91240B29-F687-4f45-9708-019B960494DF}">
-              <a14:hiddenLine xmlns="" xmlns:a14="http://schemas.microsoft.com/office/drawing/2010/main" w="9525">
+              <a14:hiddenLine xmlns:a14="http://schemas.microsoft.com/office/drawing/2010/main" xmlns="" w="9525">
                 <a:solidFill>
                   <a:srgbClr val="000000"/>
                 </a:solidFill>
@@ -16730,14 +16730,14 @@
           <a:noFill/>
           <a:extLst>
             <a:ext uri="{909E8E84-426E-40dd-AFC4-6F175D3DCCD1}">
-              <a14:hiddenFill xmlns="" xmlns:a14="http://schemas.microsoft.com/office/drawing/2010/main">
+              <a14:hiddenFill xmlns:a14="http://schemas.microsoft.com/office/drawing/2010/main" xmlns="">
                 <a:solidFill>
                   <a:srgbClr val="FFFFFF"/>
                 </a:solidFill>
               </a14:hiddenFill>
             </a:ext>
             <a:ext uri="{91240B29-F687-4f45-9708-019B960494DF}">
-              <a14:hiddenLine xmlns="" xmlns:a14="http://schemas.microsoft.com/office/drawing/2010/main" w="9525">
+              <a14:hiddenLine xmlns:a14="http://schemas.microsoft.com/office/drawing/2010/main" xmlns="" w="9525">
                 <a:solidFill>
                   <a:srgbClr val="000000"/>
                 </a:solidFill>
@@ -17430,14 +17430,14 @@
           <a:noFill/>
           <a:extLst>
             <a:ext uri="{909E8E84-426E-40dd-AFC4-6F175D3DCCD1}">
-              <a14:hiddenFill xmlns:a14="http://schemas.microsoft.com/office/drawing/2010/main" xmlns="">
+              <a14:hiddenFill xmlns="" xmlns:a14="http://schemas.microsoft.com/office/drawing/2010/main">
                 <a:solidFill>
                   <a:srgbClr val="FFFFFF"/>
                 </a:solidFill>
               </a14:hiddenFill>
             </a:ext>
             <a:ext uri="{91240B29-F687-4f45-9708-019B960494DF}">
-              <a14:hiddenLine xmlns:a14="http://schemas.microsoft.com/office/drawing/2010/main" xmlns="" w="9525">
+              <a14:hiddenLine xmlns="" xmlns:a14="http://schemas.microsoft.com/office/drawing/2010/main" w="9525">
                 <a:solidFill>
                   <a:srgbClr val="000000"/>
                 </a:solidFill>
@@ -18383,14 +18383,14 @@
           <a:noFill/>
           <a:extLst>
             <a:ext uri="{909E8E84-426E-40dd-AFC4-6F175D3DCCD1}">
-              <a14:hiddenFill xmlns:a14="http://schemas.microsoft.com/office/drawing/2010/main" xmlns="">
+              <a14:hiddenFill xmlns="" xmlns:a14="http://schemas.microsoft.com/office/drawing/2010/main">
                 <a:solidFill>
                   <a:srgbClr val="FFFFFF"/>
                 </a:solidFill>
               </a14:hiddenFill>
             </a:ext>
             <a:ext uri="{91240B29-F687-4f45-9708-019B960494DF}">
-              <a14:hiddenLine xmlns:a14="http://schemas.microsoft.com/office/drawing/2010/main" xmlns="" w="9525">
+              <a14:hiddenLine xmlns="" xmlns:a14="http://schemas.microsoft.com/office/drawing/2010/main" w="9525">
                 <a:solidFill>
                   <a:srgbClr val="000000"/>
                 </a:solidFill>
@@ -19114,14 +19114,14 @@
           <a:noFill/>
           <a:extLst>
             <a:ext uri="{909E8E84-426E-40dd-AFC4-6F175D3DCCD1}">
-              <a14:hiddenFill xmlns:a14="http://schemas.microsoft.com/office/drawing/2010/main" xmlns="">
+              <a14:hiddenFill xmlns="" xmlns:a14="http://schemas.microsoft.com/office/drawing/2010/main">
                 <a:solidFill>
                   <a:srgbClr val="FFFFFF"/>
                 </a:solidFill>
               </a14:hiddenFill>
             </a:ext>
             <a:ext uri="{91240B29-F687-4f45-9708-019B960494DF}">
-              <a14:hiddenLine xmlns:a14="http://schemas.microsoft.com/office/drawing/2010/main" xmlns="" w="9525">
+              <a14:hiddenLine xmlns="" xmlns:a14="http://schemas.microsoft.com/office/drawing/2010/main" w="9525">
                 <a:solidFill>
                   <a:srgbClr val="000000"/>
                 </a:solidFill>
@@ -19850,14 +19850,14 @@
           <a:noFill/>
           <a:extLst>
             <a:ext uri="{909E8E84-426E-40dd-AFC4-6F175D3DCCD1}">
-              <a14:hiddenFill xmlns:a14="http://schemas.microsoft.com/office/drawing/2010/main" xmlns="">
+              <a14:hiddenFill xmlns="" xmlns:a14="http://schemas.microsoft.com/office/drawing/2010/main">
                 <a:solidFill>
                   <a:srgbClr val="FFFFFF"/>
                 </a:solidFill>
               </a14:hiddenFill>
             </a:ext>
             <a:ext uri="{91240B29-F687-4f45-9708-019B960494DF}">
-              <a14:hiddenLine xmlns:a14="http://schemas.microsoft.com/office/drawing/2010/main" xmlns="" w="9525">
+              <a14:hiddenLine xmlns="" xmlns:a14="http://schemas.microsoft.com/office/drawing/2010/main" w="9525">
                 <a:solidFill>
                   <a:srgbClr val="000000"/>
                 </a:solidFill>
@@ -20776,14 +20776,14 @@
           <a:noFill/>
           <a:extLst>
             <a:ext uri="{909E8E84-426E-40dd-AFC4-6F175D3DCCD1}">
-              <a14:hiddenFill xmlns:a14="http://schemas.microsoft.com/office/drawing/2010/main" xmlns="">
+              <a14:hiddenFill xmlns="" xmlns:a14="http://schemas.microsoft.com/office/drawing/2010/main">
                 <a:solidFill>
                   <a:srgbClr val="FFFFFF"/>
                 </a:solidFill>
               </a14:hiddenFill>
             </a:ext>
             <a:ext uri="{91240B29-F687-4f45-9708-019B960494DF}">
-              <a14:hiddenLine xmlns:a14="http://schemas.microsoft.com/office/drawing/2010/main" xmlns="" w="9525">
+              <a14:hiddenLine xmlns="" xmlns:a14="http://schemas.microsoft.com/office/drawing/2010/main" w="9525">
                 <a:solidFill>
                   <a:srgbClr val="000000"/>
                 </a:solidFill>
@@ -21394,14 +21394,14 @@
           <a:effectLst/>
           <a:extLst>
             <a:ext uri="{909E8E84-426E-40dd-AFC4-6F175D3DCCD1}">
-              <a14:hiddenFill xmlns="" xmlns:a14="http://schemas.microsoft.com/office/drawing/2010/main">
+              <a14:hiddenFill xmlns:a14="http://schemas.microsoft.com/office/drawing/2010/main" xmlns="">
                 <a:solidFill>
                   <a:schemeClr val="accent1"/>
                 </a:solidFill>
               </a14:hiddenFill>
             </a:ext>
             <a:ext uri="{AF507438-7753-43e0-B8FC-AC1667EBCBE1}">
-              <a14:hiddenEffects xmlns="" xmlns:a14="http://schemas.microsoft.com/office/drawing/2010/main">
+              <a14:hiddenEffects xmlns:a14="http://schemas.microsoft.com/office/drawing/2010/main" xmlns="">
                 <a:effectLst>
                   <a:outerShdw blurRad="63500" dist="35921" dir="2700000" algn="ctr" rotWithShape="0">
                     <a:schemeClr val="bg2"/>
@@ -21496,14 +21496,14 @@
           <a:effectLst/>
           <a:extLst>
             <a:ext uri="{909E8E84-426E-40dd-AFC4-6F175D3DCCD1}">
-              <a14:hiddenFill xmlns="" xmlns:a14="http://schemas.microsoft.com/office/drawing/2010/main">
+              <a14:hiddenFill xmlns:a14="http://schemas.microsoft.com/office/drawing/2010/main" xmlns="">
                 <a:solidFill>
                   <a:schemeClr val="accent1"/>
                 </a:solidFill>
               </a14:hiddenFill>
             </a:ext>
             <a:ext uri="{AF507438-7753-43e0-B8FC-AC1667EBCBE1}">
-              <a14:hiddenEffects xmlns="" xmlns:a14="http://schemas.microsoft.com/office/drawing/2010/main">
+              <a14:hiddenEffects xmlns:a14="http://schemas.microsoft.com/office/drawing/2010/main" xmlns="">
                 <a:effectLst>
                   <a:outerShdw blurRad="63500" dist="35921" dir="2700000" algn="ctr" rotWithShape="0">
                     <a:schemeClr val="bg2"/>
@@ -21585,14 +21585,14 @@
           <a:noFill/>
           <a:extLst>
             <a:ext uri="{909E8E84-426E-40dd-AFC4-6F175D3DCCD1}">
-              <a14:hiddenFill xmlns:a14="http://schemas.microsoft.com/office/drawing/2010/main" xmlns="">
+              <a14:hiddenFill xmlns="" xmlns:a14="http://schemas.microsoft.com/office/drawing/2010/main">
                 <a:solidFill>
                   <a:srgbClr val="FFFFFF"/>
                 </a:solidFill>
               </a14:hiddenFill>
             </a:ext>
             <a:ext uri="{91240B29-F687-4f45-9708-019B960494DF}">
-              <a14:hiddenLine xmlns:a14="http://schemas.microsoft.com/office/drawing/2010/main" xmlns="" w="9525">
+              <a14:hiddenLine xmlns="" xmlns:a14="http://schemas.microsoft.com/office/drawing/2010/main" w="9525">
                 <a:solidFill>
                   <a:srgbClr val="000000"/>
                 </a:solidFill>
@@ -22420,14 +22420,14 @@
           <a:noFill/>
           <a:extLst>
             <a:ext uri="{909E8E84-426E-40dd-AFC4-6F175D3DCCD1}">
-              <a14:hiddenFill xmlns:a14="http://schemas.microsoft.com/office/drawing/2010/main" xmlns="">
+              <a14:hiddenFill xmlns="" xmlns:a14="http://schemas.microsoft.com/office/drawing/2010/main">
                 <a:solidFill>
                   <a:srgbClr val="FFFFFF"/>
                 </a:solidFill>
               </a14:hiddenFill>
             </a:ext>
             <a:ext uri="{91240B29-F687-4f45-9708-019B960494DF}">
-              <a14:hiddenLine xmlns:a14="http://schemas.microsoft.com/office/drawing/2010/main" xmlns="" w="9525">
+              <a14:hiddenLine xmlns="" xmlns:a14="http://schemas.microsoft.com/office/drawing/2010/main" w="9525">
                 <a:solidFill>
                   <a:srgbClr val="000000"/>
                 </a:solidFill>
@@ -22998,14 +22998,14 @@
           <a:noFill/>
           <a:extLst>
             <a:ext uri="{909E8E84-426E-40dd-AFC4-6F175D3DCCD1}">
-              <a14:hiddenFill xmlns:a14="http://schemas.microsoft.com/office/drawing/2010/main" xmlns="">
+              <a14:hiddenFill xmlns="" xmlns:a14="http://schemas.microsoft.com/office/drawing/2010/main">
                 <a:solidFill>
                   <a:srgbClr val="FFFFFF"/>
                 </a:solidFill>
               </a14:hiddenFill>
             </a:ext>
             <a:ext uri="{91240B29-F687-4f45-9708-019B960494DF}">
-              <a14:hiddenLine xmlns:a14="http://schemas.microsoft.com/office/drawing/2010/main" xmlns="" w="9525">
+              <a14:hiddenLine xmlns="" xmlns:a14="http://schemas.microsoft.com/office/drawing/2010/main" w="9525">
                 <a:solidFill>
                   <a:srgbClr val="000000"/>
                 </a:solidFill>
@@ -23466,14 +23466,14 @@
           <a:noFill/>
           <a:extLst>
             <a:ext uri="{909E8E84-426E-40dd-AFC4-6F175D3DCCD1}">
-              <a14:hiddenFill xmlns:a14="http://schemas.microsoft.com/office/drawing/2010/main" xmlns="">
+              <a14:hiddenFill xmlns="" xmlns:a14="http://schemas.microsoft.com/office/drawing/2010/main">
                 <a:solidFill>
                   <a:srgbClr val="FFFFFF"/>
                 </a:solidFill>
               </a14:hiddenFill>
             </a:ext>
             <a:ext uri="{91240B29-F687-4f45-9708-019B960494DF}">
-              <a14:hiddenLine xmlns:a14="http://schemas.microsoft.com/office/drawing/2010/main" xmlns="" w="9525">
+              <a14:hiddenLine xmlns="" xmlns:a14="http://schemas.microsoft.com/office/drawing/2010/main" w="9525">
                 <a:solidFill>
                   <a:srgbClr val="000000"/>
                 </a:solidFill>
@@ -23800,14 +23800,14 @@
           <a:noFill/>
           <a:extLst>
             <a:ext uri="{909E8E84-426E-40dd-AFC4-6F175D3DCCD1}">
-              <a14:hiddenFill xmlns:a14="http://schemas.microsoft.com/office/drawing/2010/main" xmlns="">
+              <a14:hiddenFill xmlns="" xmlns:a14="http://schemas.microsoft.com/office/drawing/2010/main">
                 <a:solidFill>
                   <a:srgbClr val="FFFFFF"/>
                 </a:solidFill>
               </a14:hiddenFill>
             </a:ext>
             <a:ext uri="{91240B29-F687-4f45-9708-019B960494DF}">
-              <a14:hiddenLine xmlns:a14="http://schemas.microsoft.com/office/drawing/2010/main" xmlns="" w="9525">
+              <a14:hiddenLine xmlns="" xmlns:a14="http://schemas.microsoft.com/office/drawing/2010/main" w="9525">
                 <a:solidFill>
                   <a:srgbClr val="000000"/>
                 </a:solidFill>
@@ -24023,14 +24023,14 @@
         <p:spPr>
           <a:extLst>
             <a:ext uri="{909E8E84-426E-40dd-AFC4-6F175D3DCCD1}">
-              <a14:hiddenFill xmlns:a14="http://schemas.microsoft.com/office/drawing/2010/main" xmlns="">
+              <a14:hiddenFill xmlns="" xmlns:a14="http://schemas.microsoft.com/office/drawing/2010/main">
                 <a:solidFill>
                   <a:srgbClr val="FFFFFF"/>
                 </a:solidFill>
               </a14:hiddenFill>
             </a:ext>
             <a:ext uri="{91240B29-F687-4f45-9708-019B960494DF}">
-              <a14:hiddenLine xmlns:a14="http://schemas.microsoft.com/office/drawing/2010/main" xmlns="" w="9525">
+              <a14:hiddenLine xmlns="" xmlns:a14="http://schemas.microsoft.com/office/drawing/2010/main" w="9525">
                 <a:solidFill>
                   <a:srgbClr val="000000"/>
                 </a:solidFill>
@@ -24359,14 +24359,14 @@
           <a:effectLst/>
           <a:extLst>
             <a:ext uri="{909E8E84-426E-40dd-AFC4-6F175D3DCCD1}">
-              <a14:hiddenFill xmlns="" xmlns:a14="http://schemas.microsoft.com/office/drawing/2010/main">
+              <a14:hiddenFill xmlns:a14="http://schemas.microsoft.com/office/drawing/2010/main" xmlns="">
                 <a:solidFill>
                   <a:schemeClr val="accent1"/>
                 </a:solidFill>
               </a14:hiddenFill>
             </a:ext>
             <a:ext uri="{AF507438-7753-43e0-B8FC-AC1667EBCBE1}">
-              <a14:hiddenEffects xmlns="" xmlns:a14="http://schemas.microsoft.com/office/drawing/2010/main">
+              <a14:hiddenEffects xmlns:a14="http://schemas.microsoft.com/office/drawing/2010/main" xmlns="">
                 <a:effectLst>
                   <a:outerShdw blurRad="63500" dist="35921" dir="2700000" algn="ctr" rotWithShape="0">
                     <a:schemeClr val="bg2"/>
@@ -24461,14 +24461,14 @@
           <a:noFill/>
           <a:extLst>
             <a:ext uri="{909E8E84-426E-40dd-AFC4-6F175D3DCCD1}">
-              <a14:hiddenFill xmlns:a14="http://schemas.microsoft.com/office/drawing/2010/main" xmlns="">
+              <a14:hiddenFill xmlns="" xmlns:a14="http://schemas.microsoft.com/office/drawing/2010/main">
                 <a:solidFill>
                   <a:srgbClr val="FFFFFF"/>
                 </a:solidFill>
               </a14:hiddenFill>
             </a:ext>
             <a:ext uri="{91240B29-F687-4f45-9708-019B960494DF}">
-              <a14:hiddenLine xmlns:a14="http://schemas.microsoft.com/office/drawing/2010/main" xmlns="" w="9525">
+              <a14:hiddenLine xmlns="" xmlns:a14="http://schemas.microsoft.com/office/drawing/2010/main" w="9525">
                 <a:solidFill>
                   <a:srgbClr val="000000"/>
                 </a:solidFill>
@@ -25177,14 +25177,14 @@
           <a:noFill/>
           <a:extLst>
             <a:ext uri="{909E8E84-426E-40dd-AFC4-6F175D3DCCD1}">
-              <a14:hiddenFill xmlns:a14="http://schemas.microsoft.com/office/drawing/2010/main" xmlns="">
+              <a14:hiddenFill xmlns="" xmlns:a14="http://schemas.microsoft.com/office/drawing/2010/main">
                 <a:solidFill>
                   <a:srgbClr val="FFFFFF"/>
                 </a:solidFill>
               </a14:hiddenFill>
             </a:ext>
             <a:ext uri="{91240B29-F687-4f45-9708-019B960494DF}">
-              <a14:hiddenLine xmlns:a14="http://schemas.microsoft.com/office/drawing/2010/main" xmlns="" w="9525">
+              <a14:hiddenLine xmlns="" xmlns:a14="http://schemas.microsoft.com/office/drawing/2010/main" w="9525">
                 <a:solidFill>
                   <a:srgbClr val="000000"/>
                 </a:solidFill>
@@ -25900,14 +25900,14 @@
           <a:noFill/>
           <a:extLst>
             <a:ext uri="{909E8E84-426E-40dd-AFC4-6F175D3DCCD1}">
-              <a14:hiddenFill xmlns:a14="http://schemas.microsoft.com/office/drawing/2010/main" xmlns="">
+              <a14:hiddenFill xmlns="" xmlns:a14="http://schemas.microsoft.com/office/drawing/2010/main">
                 <a:solidFill>
                   <a:srgbClr val="FFFFFF"/>
                 </a:solidFill>
               </a14:hiddenFill>
             </a:ext>
             <a:ext uri="{91240B29-F687-4f45-9708-019B960494DF}">
-              <a14:hiddenLine xmlns:a14="http://schemas.microsoft.com/office/drawing/2010/main" xmlns="" w="9525">
+              <a14:hiddenLine xmlns="" xmlns:a14="http://schemas.microsoft.com/office/drawing/2010/main" w="9525">
                 <a:solidFill>
                   <a:srgbClr val="000000"/>
                 </a:solidFill>
@@ -26468,14 +26468,14 @@
           <a:effectLst/>
           <a:extLst>
             <a:ext uri="{909E8E84-426E-40dd-AFC4-6F175D3DCCD1}">
-              <a14:hiddenFill xmlns="" xmlns:a14="http://schemas.microsoft.com/office/drawing/2010/main">
+              <a14:hiddenFill xmlns:a14="http://schemas.microsoft.com/office/drawing/2010/main" xmlns="">
                 <a:solidFill>
                   <a:schemeClr val="accent1"/>
                 </a:solidFill>
               </a14:hiddenFill>
             </a:ext>
             <a:ext uri="{AF507438-7753-43e0-B8FC-AC1667EBCBE1}">
-              <a14:hiddenEffects xmlns="" xmlns:a14="http://schemas.microsoft.com/office/drawing/2010/main">
+              <a14:hiddenEffects xmlns:a14="http://schemas.microsoft.com/office/drawing/2010/main" xmlns="">
                 <a:effectLst>
                   <a:outerShdw blurRad="63500" dist="35921" dir="2700000" algn="ctr" rotWithShape="0">
                     <a:schemeClr val="bg2"/>
@@ -26526,14 +26526,14 @@
           <a:noFill/>
           <a:extLst>
             <a:ext uri="{909E8E84-426E-40dd-AFC4-6F175D3DCCD1}">
-              <a14:hiddenFill xmlns:a14="http://schemas.microsoft.com/office/drawing/2010/main" xmlns="">
+              <a14:hiddenFill xmlns="" xmlns:a14="http://schemas.microsoft.com/office/drawing/2010/main">
                 <a:solidFill>
                   <a:srgbClr val="FFFFFF"/>
                 </a:solidFill>
               </a14:hiddenFill>
             </a:ext>
             <a:ext uri="{91240B29-F687-4f45-9708-019B960494DF}">
-              <a14:hiddenLine xmlns:a14="http://schemas.microsoft.com/office/drawing/2010/main" xmlns="" w="9525">
+              <a14:hiddenLine xmlns="" xmlns:a14="http://schemas.microsoft.com/office/drawing/2010/main" w="9525">
                 <a:solidFill>
                   <a:srgbClr val="000000"/>
                 </a:solidFill>
@@ -27102,14 +27102,14 @@
           <a:effectLst/>
           <a:extLst>
             <a:ext uri="{909E8E84-426E-40dd-AFC4-6F175D3DCCD1}">
-              <a14:hiddenFill xmlns="" xmlns:a14="http://schemas.microsoft.com/office/drawing/2010/main">
+              <a14:hiddenFill xmlns:a14="http://schemas.microsoft.com/office/drawing/2010/main" xmlns="">
                 <a:solidFill>
                   <a:schemeClr val="accent1"/>
                 </a:solidFill>
               </a14:hiddenFill>
             </a:ext>
             <a:ext uri="{AF507438-7753-43e0-B8FC-AC1667EBCBE1}">
-              <a14:hiddenEffects xmlns="" xmlns:a14="http://schemas.microsoft.com/office/drawing/2010/main">
+              <a14:hiddenEffects xmlns:a14="http://schemas.microsoft.com/office/drawing/2010/main" xmlns="">
                 <a:effectLst>
                   <a:outerShdw blurRad="63500" dist="35921" dir="2700000" algn="ctr" rotWithShape="0">
                     <a:schemeClr val="bg2"/>
@@ -27173,14 +27173,14 @@
           <a:effectLst/>
           <a:extLst>
             <a:ext uri="{909E8E84-426E-40dd-AFC4-6F175D3DCCD1}">
-              <a14:hiddenFill xmlns="" xmlns:a14="http://schemas.microsoft.com/office/drawing/2010/main">
+              <a14:hiddenFill xmlns:a14="http://schemas.microsoft.com/office/drawing/2010/main" xmlns="">
                 <a:solidFill>
                   <a:schemeClr val="accent1"/>
                 </a:solidFill>
               </a14:hiddenFill>
             </a:ext>
             <a:ext uri="{AF507438-7753-43e0-B8FC-AC1667EBCBE1}">
-              <a14:hiddenEffects xmlns="" xmlns:a14="http://schemas.microsoft.com/office/drawing/2010/main">
+              <a14:hiddenEffects xmlns:a14="http://schemas.microsoft.com/office/drawing/2010/main" xmlns="">
                 <a:effectLst>
                   <a:outerShdw blurRad="63500" dist="35921" dir="2700000" algn="ctr" rotWithShape="0">
                     <a:schemeClr val="bg2"/>
@@ -27231,14 +27231,14 @@
           <a:noFill/>
           <a:extLst>
             <a:ext uri="{909E8E84-426E-40dd-AFC4-6F175D3DCCD1}">
-              <a14:hiddenFill xmlns:a14="http://schemas.microsoft.com/office/drawing/2010/main" xmlns="">
+              <a14:hiddenFill xmlns="" xmlns:a14="http://schemas.microsoft.com/office/drawing/2010/main">
                 <a:solidFill>
                   <a:srgbClr val="FFFFFF"/>
                 </a:solidFill>
               </a14:hiddenFill>
             </a:ext>
             <a:ext uri="{91240B29-F687-4f45-9708-019B960494DF}">
-              <a14:hiddenLine xmlns:a14="http://schemas.microsoft.com/office/drawing/2010/main" xmlns="" w="9525">
+              <a14:hiddenLine xmlns="" xmlns:a14="http://schemas.microsoft.com/office/drawing/2010/main" w="9525">
                 <a:solidFill>
                   <a:srgbClr val="000000"/>
                 </a:solidFill>
@@ -27818,14 +27818,14 @@
           <a:noFill/>
           <a:extLst>
             <a:ext uri="{909E8E84-426E-40dd-AFC4-6F175D3DCCD1}">
-              <a14:hiddenFill xmlns:a14="http://schemas.microsoft.com/office/drawing/2010/main" xmlns="">
+              <a14:hiddenFill xmlns="" xmlns:a14="http://schemas.microsoft.com/office/drawing/2010/main">
                 <a:solidFill>
                   <a:srgbClr val="FFFFFF"/>
                 </a:solidFill>
               </a14:hiddenFill>
             </a:ext>
             <a:ext uri="{91240B29-F687-4f45-9708-019B960494DF}">
-              <a14:hiddenLine xmlns:a14="http://schemas.microsoft.com/office/drawing/2010/main" xmlns="" w="9525">
+              <a14:hiddenLine xmlns="" xmlns:a14="http://schemas.microsoft.com/office/drawing/2010/main" w="9525">
                 <a:solidFill>
                   <a:srgbClr val="000000"/>
                 </a:solidFill>
@@ -28366,14 +28366,14 @@
           <a:effectLst/>
           <a:extLst>
             <a:ext uri="{909E8E84-426E-40dd-AFC4-6F175D3DCCD1}">
-              <a14:hiddenFill xmlns="" xmlns:a14="http://schemas.microsoft.com/office/drawing/2010/main">
+              <a14:hiddenFill xmlns:a14="http://schemas.microsoft.com/office/drawing/2010/main" xmlns="">
                 <a:solidFill>
                   <a:schemeClr val="accent1"/>
                 </a:solidFill>
               </a14:hiddenFill>
             </a:ext>
             <a:ext uri="{AF507438-7753-43e0-B8FC-AC1667EBCBE1}">
-              <a14:hiddenEffects xmlns="" xmlns:a14="http://schemas.microsoft.com/office/drawing/2010/main">
+              <a14:hiddenEffects xmlns:a14="http://schemas.microsoft.com/office/drawing/2010/main" xmlns="">
                 <a:effectLst>
                   <a:outerShdw blurRad="63500" dist="35921" dir="2700000" algn="ctr" rotWithShape="0">
                     <a:schemeClr val="bg2"/>
@@ -28431,14 +28431,14 @@
           <a:effectLst/>
           <a:extLst>
             <a:ext uri="{909E8E84-426E-40dd-AFC4-6F175D3DCCD1}">
-              <a14:hiddenFill xmlns="" xmlns:a14="http://schemas.microsoft.com/office/drawing/2010/main">
+              <a14:hiddenFill xmlns:a14="http://schemas.microsoft.com/office/drawing/2010/main" xmlns="">
                 <a:solidFill>
                   <a:schemeClr val="accent1"/>
                 </a:solidFill>
               </a14:hiddenFill>
             </a:ext>
             <a:ext uri="{AF507438-7753-43e0-B8FC-AC1667EBCBE1}">
-              <a14:hiddenEffects xmlns="" xmlns:a14="http://schemas.microsoft.com/office/drawing/2010/main">
+              <a14:hiddenEffects xmlns:a14="http://schemas.microsoft.com/office/drawing/2010/main" xmlns="">
                 <a:effectLst>
                   <a:outerShdw blurRad="63500" dist="35921" dir="2700000" algn="ctr" rotWithShape="0">
                     <a:schemeClr val="bg2"/>
@@ -28496,14 +28496,14 @@
           <a:effectLst/>
           <a:extLst>
             <a:ext uri="{909E8E84-426E-40dd-AFC4-6F175D3DCCD1}">
-              <a14:hiddenFill xmlns="" xmlns:a14="http://schemas.microsoft.com/office/drawing/2010/main">
+              <a14:hiddenFill xmlns:a14="http://schemas.microsoft.com/office/drawing/2010/main" xmlns="">
                 <a:solidFill>
                   <a:schemeClr val="accent1"/>
                 </a:solidFill>
               </a14:hiddenFill>
             </a:ext>
             <a:ext uri="{AF507438-7753-43e0-B8FC-AC1667EBCBE1}">
-              <a14:hiddenEffects xmlns="" xmlns:a14="http://schemas.microsoft.com/office/drawing/2010/main">
+              <a14:hiddenEffects xmlns:a14="http://schemas.microsoft.com/office/drawing/2010/main" xmlns="">
                 <a:effectLst>
                   <a:outerShdw blurRad="63500" dist="35921" dir="2700000" algn="ctr" rotWithShape="0">
                     <a:schemeClr val="bg2"/>
@@ -28561,14 +28561,14 @@
           <a:effectLst/>
           <a:extLst>
             <a:ext uri="{909E8E84-426E-40dd-AFC4-6F175D3DCCD1}">
-              <a14:hiddenFill xmlns="" xmlns:a14="http://schemas.microsoft.com/office/drawing/2010/main">
+              <a14:hiddenFill xmlns:a14="http://schemas.microsoft.com/office/drawing/2010/main" xmlns="">
                 <a:solidFill>
                   <a:schemeClr val="accent1"/>
                 </a:solidFill>
               </a14:hiddenFill>
             </a:ext>
             <a:ext uri="{AF507438-7753-43e0-B8FC-AC1667EBCBE1}">
-              <a14:hiddenEffects xmlns="" xmlns:a14="http://schemas.microsoft.com/office/drawing/2010/main">
+              <a14:hiddenEffects xmlns:a14="http://schemas.microsoft.com/office/drawing/2010/main" xmlns="">
                 <a:effectLst>
                   <a:outerShdw blurRad="63500" dist="35921" dir="2700000" algn="ctr" rotWithShape="0">
                     <a:schemeClr val="bg2"/>
@@ -28614,14 +28614,14 @@
           <a:effectLst/>
           <a:extLst>
             <a:ext uri="{909E8E84-426E-40dd-AFC4-6F175D3DCCD1}">
-              <a14:hiddenFill xmlns="" xmlns:a14="http://schemas.microsoft.com/office/drawing/2010/main">
+              <a14:hiddenFill xmlns:a14="http://schemas.microsoft.com/office/drawing/2010/main" xmlns="">
                 <a:solidFill>
                   <a:schemeClr val="accent1"/>
                 </a:solidFill>
               </a14:hiddenFill>
             </a:ext>
             <a:ext uri="{AF507438-7753-43e0-B8FC-AC1667EBCBE1}">
-              <a14:hiddenEffects xmlns="" xmlns:a14="http://schemas.microsoft.com/office/drawing/2010/main">
+              <a14:hiddenEffects xmlns:a14="http://schemas.microsoft.com/office/drawing/2010/main" xmlns="">
                 <a:effectLst>
                   <a:outerShdw blurRad="63500" dist="35921" dir="2700000" algn="ctr" rotWithShape="0">
                     <a:schemeClr val="bg2"/>
@@ -28667,14 +28667,14 @@
           <a:effectLst/>
           <a:extLst>
             <a:ext uri="{909E8E84-426E-40dd-AFC4-6F175D3DCCD1}">
-              <a14:hiddenFill xmlns="" xmlns:a14="http://schemas.microsoft.com/office/drawing/2010/main">
+              <a14:hiddenFill xmlns:a14="http://schemas.microsoft.com/office/drawing/2010/main" xmlns="">
                 <a:solidFill>
                   <a:schemeClr val="accent1"/>
                 </a:solidFill>
               </a14:hiddenFill>
             </a:ext>
             <a:ext uri="{AF507438-7753-43e0-B8FC-AC1667EBCBE1}">
-              <a14:hiddenEffects xmlns="" xmlns:a14="http://schemas.microsoft.com/office/drawing/2010/main">
+              <a14:hiddenEffects xmlns:a14="http://schemas.microsoft.com/office/drawing/2010/main" xmlns="">
                 <a:effectLst>
                   <a:outerShdw blurRad="63500" dist="35921" dir="2700000" algn="ctr" rotWithShape="0">
                     <a:schemeClr val="bg2"/>
@@ -28710,14 +28710,14 @@
           <a:noFill/>
           <a:extLst>
             <a:ext uri="{909E8E84-426E-40dd-AFC4-6F175D3DCCD1}">
-              <a14:hiddenFill xmlns:a14="http://schemas.microsoft.com/office/drawing/2010/main" xmlns="">
+              <a14:hiddenFill xmlns="" xmlns:a14="http://schemas.microsoft.com/office/drawing/2010/main">
                 <a:solidFill>
                   <a:srgbClr val="FFFFFF"/>
                 </a:solidFill>
               </a14:hiddenFill>
             </a:ext>
             <a:ext uri="{91240B29-F687-4f45-9708-019B960494DF}">
-              <a14:hiddenLine xmlns:a14="http://schemas.microsoft.com/office/drawing/2010/main" xmlns="" w="9525">
+              <a14:hiddenLine xmlns="" xmlns:a14="http://schemas.microsoft.com/office/drawing/2010/main" w="9525">
                 <a:solidFill>
                   <a:srgbClr val="000000"/>
                 </a:solidFill>
